--- a/material/Python/04_리스트.pptx
+++ b/material/Python/04_리스트.pptx
@@ -1,6 +1,6 @@
 
 <file path=ppt/presentation.xml><?xml version="1.0" encoding="utf-8"?>
-<p:presentation xmlns:a="http://schemas.openxmlformats.org/drawingml/2006/main" xmlns:r="http://schemas.openxmlformats.org/officeDocument/2006/relationships" xmlns:p="http://schemas.openxmlformats.org/presentationml/2006/main" saveSubsetFonts="1">
+<p:presentation xmlns:a="http://schemas.openxmlformats.org/drawingml/2006/main" xmlns:r="http://schemas.openxmlformats.org/officeDocument/2006/relationships" xmlns:p="http://schemas.openxmlformats.org/presentationml/2006/main" embedTrueTypeFonts="1" saveSubsetFonts="1">
   <p:sldMasterIdLst>
     <p:sldMasterId id="2147483660" r:id="rId1"/>
   </p:sldMasterIdLst>
@@ -65,6 +65,29 @@
   </p:sldIdLst>
   <p:sldSz cx="12192000" cy="6858000"/>
   <p:notesSz cx="6858000" cy="9144000"/>
+  <p:embeddedFontLst>
+    <p:embeddedFont>
+      <p:font typeface="G마켓 산스 TTF Bold" panose="02000000000000000000" pitchFamily="2" charset="-127"/>
+      <p:bold r:id="rId57"/>
+    </p:embeddedFont>
+    <p:embeddedFont>
+      <p:font typeface="Pretendard Black" panose="02000A03000000020004" pitchFamily="2" charset="-127"/>
+      <p:bold r:id="rId58"/>
+    </p:embeddedFont>
+    <p:embeddedFont>
+      <p:font typeface="Pretendard Light" panose="02000403000000020004" pitchFamily="2" charset="-127"/>
+      <p:regular r:id="rId59"/>
+    </p:embeddedFont>
+    <p:embeddedFont>
+      <p:font typeface="Pretendard Medium" panose="02000603000000020004" pitchFamily="2" charset="-127"/>
+      <p:regular r:id="rId60"/>
+    </p:embeddedFont>
+    <p:embeddedFont>
+      <p:font typeface="메이플스토리" panose="02000300000000000000" pitchFamily="2" charset="-127"/>
+      <p:regular r:id="rId61"/>
+      <p:bold r:id="rId62"/>
+    </p:embeddedFont>
+  </p:embeddedFontLst>
   <p:defaultTextStyle>
     <a:defPPr>
       <a:defRPr lang="ko-KR"/>
@@ -271,7 +294,7 @@
             <a:fld id="{A13A867C-D490-40C2-AB8D-A60FA70A9BF5}" type="datetimeFigureOut">
               <a:rPr lang="ko-KR" altLang="en-US" smtClean="0"/>
               <a:pPr/>
-              <a:t>2025-07-16</a:t>
+              <a:t>2025-08-21</a:t>
             </a:fld>
             <a:endParaRPr lang="ko-KR" altLang="en-US" dirty="0"/>
           </a:p>
@@ -5775,7 +5798,7 @@
           <a:p>
             <a:fld id="{442BEE3F-2E9A-4FD8-8B8A-8619F3E161C0}" type="datetime1">
               <a:rPr lang="ko-KR" altLang="en-US" smtClean="0"/>
-              <a:t>2025-07-16</a:t>
+              <a:t>2025-08-21</a:t>
             </a:fld>
             <a:endParaRPr lang="ko-KR" altLang="en-US"/>
           </a:p>
@@ -6062,7 +6085,7 @@
           <a:p>
             <a:fld id="{0F78D9C4-20C1-4B15-A116-16DC77AD9A1E}" type="datetime1">
               <a:rPr lang="ko-KR" altLang="en-US" smtClean="0"/>
-              <a:t>2025-07-16</a:t>
+              <a:t>2025-08-21</a:t>
             </a:fld>
             <a:endParaRPr lang="ko-KR" altLang="en-US"/>
           </a:p>
@@ -6237,7 +6260,7 @@
           <a:p>
             <a:fld id="{7F5E23C3-0E3D-4E4E-8486-D7FB4C073DC1}" type="datetime1">
               <a:rPr lang="ko-KR" altLang="en-US" smtClean="0"/>
-              <a:t>2025-07-16</a:t>
+              <a:t>2025-08-21</a:t>
             </a:fld>
             <a:endParaRPr lang="ko-KR" altLang="en-US"/>
           </a:p>
@@ -6566,7 +6589,7 @@
           <a:p>
             <a:fld id="{7F5E23C3-0E3D-4E4E-8486-D7FB4C073DC1}" type="datetime1">
               <a:rPr lang="ko-KR" altLang="en-US" smtClean="0"/>
-              <a:t>2025-07-16</a:t>
+              <a:t>2025-08-21</a:t>
             </a:fld>
             <a:endParaRPr lang="ko-KR" altLang="en-US"/>
           </a:p>
@@ -7457,7 +7480,7 @@
           <a:p>
             <a:fld id="{0F78D9C4-20C1-4B15-A116-16DC77AD9A1E}" type="datetime1">
               <a:rPr lang="ko-KR" altLang="en-US" smtClean="0"/>
-              <a:t>2025-07-16</a:t>
+              <a:t>2025-08-21</a:t>
             </a:fld>
             <a:endParaRPr lang="ko-KR" altLang="en-US"/>
           </a:p>
@@ -8062,7 +8085,7 @@
           <a:p>
             <a:fld id="{0F78D9C4-20C1-4B15-A116-16DC77AD9A1E}" type="datetime1">
               <a:rPr lang="ko-KR" altLang="en-US" smtClean="0"/>
-              <a:t>2025-07-16</a:t>
+              <a:t>2025-08-21</a:t>
             </a:fld>
             <a:endParaRPr lang="ko-KR" altLang="en-US"/>
           </a:p>
@@ -8303,7 +8326,7 @@
           <a:p>
             <a:fld id="{0F78D9C4-20C1-4B15-A116-16DC77AD9A1E}" type="datetime1">
               <a:rPr lang="ko-KR" altLang="en-US" smtClean="0"/>
-              <a:t>2025-07-16</a:t>
+              <a:t>2025-08-21</a:t>
             </a:fld>
             <a:endParaRPr lang="ko-KR" altLang="en-US"/>
           </a:p>
@@ -8659,7 +8682,7 @@
           <a:p>
             <a:fld id="{0F78D9C4-20C1-4B15-A116-16DC77AD9A1E}" type="datetime1">
               <a:rPr lang="ko-KR" altLang="en-US" smtClean="0"/>
-              <a:t>2025-07-16</a:t>
+              <a:t>2025-08-21</a:t>
             </a:fld>
             <a:endParaRPr lang="ko-KR" altLang="en-US"/>
           </a:p>
@@ -9114,7 +9137,7 @@
           <a:p>
             <a:fld id="{0F78D9C4-20C1-4B15-A116-16DC77AD9A1E}" type="datetime1">
               <a:rPr lang="ko-KR" altLang="en-US" smtClean="0"/>
-              <a:t>2025-07-16</a:t>
+              <a:t>2025-08-21</a:t>
             </a:fld>
             <a:endParaRPr lang="ko-KR" altLang="en-US"/>
           </a:p>
@@ -9352,7 +9375,7 @@
           <a:p>
             <a:fld id="{0F78D9C4-20C1-4B15-A116-16DC77AD9A1E}" type="datetime1">
               <a:rPr lang="ko-KR" altLang="en-US" smtClean="0"/>
-              <a:t>2025-07-16</a:t>
+              <a:t>2025-08-21</a:t>
             </a:fld>
             <a:endParaRPr lang="ko-KR" altLang="en-US"/>
           </a:p>
@@ -9587,7 +9610,7 @@
           <a:p>
             <a:fld id="{0F78D9C4-20C1-4B15-A116-16DC77AD9A1E}" type="datetime1">
               <a:rPr lang="ko-KR" altLang="en-US" smtClean="0"/>
-              <a:t>2025-07-16</a:t>
+              <a:t>2025-08-21</a:t>
             </a:fld>
             <a:endParaRPr lang="ko-KR" altLang="en-US"/>
           </a:p>
@@ -10093,7 +10116,7 @@
           <a:p>
             <a:fld id="{0F78D9C4-20C1-4B15-A116-16DC77AD9A1E}" type="datetime1">
               <a:rPr lang="ko-KR" altLang="en-US" smtClean="0"/>
-              <a:t>2025-07-16</a:t>
+              <a:t>2025-08-21</a:t>
             </a:fld>
             <a:endParaRPr lang="ko-KR" altLang="en-US"/>
           </a:p>
@@ -10407,7 +10430,7 @@
           <a:p>
             <a:fld id="{0F78D9C4-20C1-4B15-A116-16DC77AD9A1E}" type="datetime1">
               <a:rPr lang="ko-KR" altLang="en-US" smtClean="0"/>
-              <a:t>2025-07-16</a:t>
+              <a:t>2025-08-21</a:t>
             </a:fld>
             <a:endParaRPr lang="ko-KR" altLang="en-US"/>
           </a:p>
@@ -10635,7 +10658,7 @@
           <a:p>
             <a:fld id="{0F78D9C4-20C1-4B15-A116-16DC77AD9A1E}" type="datetime1">
               <a:rPr lang="ko-KR" altLang="en-US" smtClean="0"/>
-              <a:t>2025-07-16</a:t>
+              <a:t>2025-08-21</a:t>
             </a:fld>
             <a:endParaRPr lang="ko-KR" altLang="en-US"/>
           </a:p>
@@ -11005,7 +11028,7 @@
           <a:p>
             <a:fld id="{0F78D9C4-20C1-4B15-A116-16DC77AD9A1E}" type="datetime1">
               <a:rPr lang="ko-KR" altLang="en-US" smtClean="0"/>
-              <a:t>2025-07-16</a:t>
+              <a:t>2025-08-21</a:t>
             </a:fld>
             <a:endParaRPr lang="ko-KR" altLang="en-US"/>
           </a:p>
@@ -11270,7 +11293,7 @@
           <a:p>
             <a:fld id="{0F78D9C4-20C1-4B15-A116-16DC77AD9A1E}" type="datetime1">
               <a:rPr lang="ko-KR" altLang="en-US" smtClean="0"/>
-              <a:t>2025-07-16</a:t>
+              <a:t>2025-08-21</a:t>
             </a:fld>
             <a:endParaRPr lang="ko-KR" altLang="en-US"/>
           </a:p>
@@ -11771,7 +11794,7 @@
           <a:p>
             <a:fld id="{76022175-F16A-4A96-8E45-178BE9345AE9}" type="datetime6">
               <a:rPr lang="ko-KR" altLang="en-US" smtClean="0"/>
-              <a:t>2025년 7월</a:t>
+              <a:t>2025년 8월</a:t>
             </a:fld>
             <a:endParaRPr lang="ko-KR" altLang="en-US"/>
           </a:p>
@@ -12430,7 +12453,7 @@
           <a:p>
             <a:fld id="{76022175-F16A-4A96-8E45-178BE9345AE9}" type="datetime6">
               <a:rPr lang="ko-KR" altLang="en-US" smtClean="0"/>
-              <a:t>2025년 7월</a:t>
+              <a:t>2025년 8월</a:t>
             </a:fld>
             <a:endParaRPr lang="ko-KR" altLang="en-US"/>
           </a:p>
@@ -13200,7 +13223,7 @@
           <a:p>
             <a:fld id="{76022175-F16A-4A96-8E45-178BE9345AE9}" type="datetime6">
               <a:rPr lang="ko-KR" altLang="en-US" smtClean="0"/>
-              <a:t>2025년 7월</a:t>
+              <a:t>2025년 8월</a:t>
             </a:fld>
             <a:endParaRPr lang="ko-KR" altLang="en-US"/>
           </a:p>
@@ -13584,7 +13607,7 @@
           <a:p>
             <a:fld id="{0F78D9C4-20C1-4B15-A116-16DC77AD9A1E}" type="datetime1">
               <a:rPr lang="ko-KR" altLang="en-US" smtClean="0"/>
-              <a:t>2025-07-16</a:t>
+              <a:t>2025-08-21</a:t>
             </a:fld>
             <a:endParaRPr lang="ko-KR" altLang="en-US"/>
           </a:p>
@@ -14043,7 +14066,7 @@
           <a:p>
             <a:fld id="{0F78D9C4-20C1-4B15-A116-16DC77AD9A1E}" type="datetime1">
               <a:rPr lang="ko-KR" altLang="en-US" smtClean="0"/>
-              <a:t>2025-07-16</a:t>
+              <a:t>2025-08-21</a:t>
             </a:fld>
             <a:endParaRPr lang="ko-KR" altLang="en-US"/>
           </a:p>
@@ -14382,7 +14405,7 @@
           <a:p>
             <a:fld id="{0F78D9C4-20C1-4B15-A116-16DC77AD9A1E}" type="datetime1">
               <a:rPr lang="ko-KR" altLang="en-US" smtClean="0"/>
-              <a:t>2025-07-16</a:t>
+              <a:t>2025-08-21</a:t>
             </a:fld>
             <a:endParaRPr lang="ko-KR" altLang="en-US"/>
           </a:p>
@@ -14604,7 +14627,7 @@
           <a:p>
             <a:fld id="{0F78D9C4-20C1-4B15-A116-16DC77AD9A1E}" type="datetime1">
               <a:rPr lang="ko-KR" altLang="en-US" smtClean="0"/>
-              <a:t>2025-07-16</a:t>
+              <a:t>2025-08-21</a:t>
             </a:fld>
             <a:endParaRPr lang="ko-KR" altLang="en-US"/>
           </a:p>
@@ -14794,7 +14817,7 @@
           <a:p>
             <a:fld id="{0F78D9C4-20C1-4B15-A116-16DC77AD9A1E}" type="datetime1">
               <a:rPr lang="ko-KR" altLang="en-US" smtClean="0"/>
-              <a:t>2025-07-16</a:t>
+              <a:t>2025-08-21</a:t>
             </a:fld>
             <a:endParaRPr lang="ko-KR" altLang="en-US"/>
           </a:p>
@@ -15267,7 +15290,7 @@
           <a:p>
             <a:fld id="{0F78D9C4-20C1-4B15-A116-16DC77AD9A1E}" type="datetime1">
               <a:rPr lang="ko-KR" altLang="en-US" smtClean="0"/>
-              <a:t>2025-07-16</a:t>
+              <a:t>2025-08-21</a:t>
             </a:fld>
             <a:endParaRPr lang="ko-KR" altLang="en-US"/>
           </a:p>
@@ -15522,7 +15545,7 @@
           <a:p>
             <a:fld id="{0F78D9C4-20C1-4B15-A116-16DC77AD9A1E}" type="datetime1">
               <a:rPr lang="ko-KR" altLang="en-US" smtClean="0"/>
-              <a:t>2025-07-16</a:t>
+              <a:t>2025-08-21</a:t>
             </a:fld>
             <a:endParaRPr lang="ko-KR" altLang="en-US"/>
           </a:p>
@@ -15972,7 +15995,7 @@
           <a:p>
             <a:fld id="{0F78D9C4-20C1-4B15-A116-16DC77AD9A1E}" type="datetime1">
               <a:rPr lang="ko-KR" altLang="en-US" smtClean="0"/>
-              <a:t>2025-07-16</a:t>
+              <a:t>2025-08-21</a:t>
             </a:fld>
             <a:endParaRPr lang="ko-KR" altLang="en-US"/>
           </a:p>
@@ -16266,7 +16289,7 @@
           <a:p>
             <a:fld id="{0F78D9C4-20C1-4B15-A116-16DC77AD9A1E}" type="datetime1">
               <a:rPr lang="ko-KR" altLang="en-US" smtClean="0"/>
-              <a:t>2025-07-16</a:t>
+              <a:t>2025-08-21</a:t>
             </a:fld>
             <a:endParaRPr lang="ko-KR" altLang="en-US"/>
           </a:p>
@@ -16886,7 +16909,7 @@
           <a:p>
             <a:fld id="{76022175-F16A-4A96-8E45-178BE9345AE9}" type="datetime6">
               <a:rPr lang="ko-KR" altLang="en-US" smtClean="0"/>
-              <a:t>2025년 7월</a:t>
+              <a:t>2025년 8월</a:t>
             </a:fld>
             <a:endParaRPr lang="ko-KR" altLang="en-US"/>
           </a:p>
@@ -17296,7 +17319,7 @@
           <a:p>
             <a:fld id="{76022175-F16A-4A96-8E45-178BE9345AE9}" type="datetime6">
               <a:rPr lang="ko-KR" altLang="en-US" smtClean="0"/>
-              <a:t>2025년 7월</a:t>
+              <a:t>2025년 8월</a:t>
             </a:fld>
             <a:endParaRPr lang="ko-KR" altLang="en-US"/>
           </a:p>
@@ -17630,7 +17653,7 @@
           <a:p>
             <a:fld id="{0F78D9C4-20C1-4B15-A116-16DC77AD9A1E}" type="datetime1">
               <a:rPr lang="ko-KR" altLang="en-US" smtClean="0"/>
-              <a:t>2025-07-16</a:t>
+              <a:t>2025-08-21</a:t>
             </a:fld>
             <a:endParaRPr lang="ko-KR" altLang="en-US"/>
           </a:p>
@@ -18158,7 +18181,7 @@
           <a:p>
             <a:fld id="{0F78D9C4-20C1-4B15-A116-16DC77AD9A1E}" type="datetime1">
               <a:rPr lang="ko-KR" altLang="en-US" smtClean="0"/>
-              <a:t>2025-07-16</a:t>
+              <a:t>2025-08-21</a:t>
             </a:fld>
             <a:endParaRPr lang="ko-KR" altLang="en-US"/>
           </a:p>
@@ -18589,7 +18612,7 @@
           <a:p>
             <a:fld id="{0F78D9C4-20C1-4B15-A116-16DC77AD9A1E}" type="datetime1">
               <a:rPr lang="ko-KR" altLang="en-US" smtClean="0"/>
-              <a:t>2025-07-16</a:t>
+              <a:t>2025-08-21</a:t>
             </a:fld>
             <a:endParaRPr lang="ko-KR" altLang="en-US"/>
           </a:p>
@@ -19058,7 +19081,7 @@
           <a:p>
             <a:fld id="{0F78D9C4-20C1-4B15-A116-16DC77AD9A1E}" type="datetime1">
               <a:rPr lang="ko-KR" altLang="en-US" smtClean="0"/>
-              <a:t>2025-07-16</a:t>
+              <a:t>2025-08-21</a:t>
             </a:fld>
             <a:endParaRPr lang="ko-KR" altLang="en-US"/>
           </a:p>
@@ -19491,7 +19514,7 @@
           <a:p>
             <a:fld id="{0F78D9C4-20C1-4B15-A116-16DC77AD9A1E}" type="datetime1">
               <a:rPr lang="ko-KR" altLang="en-US" smtClean="0"/>
-              <a:t>2025-07-16</a:t>
+              <a:t>2025-08-21</a:t>
             </a:fld>
             <a:endParaRPr lang="ko-KR" altLang="en-US"/>
           </a:p>
@@ -19916,7 +19939,7 @@
           <a:p>
             <a:fld id="{0F78D9C4-20C1-4B15-A116-16DC77AD9A1E}" type="datetime1">
               <a:rPr lang="ko-KR" altLang="en-US" smtClean="0"/>
-              <a:t>2025-07-16</a:t>
+              <a:t>2025-08-21</a:t>
             </a:fld>
             <a:endParaRPr lang="ko-KR" altLang="en-US"/>
           </a:p>
@@ -20313,7 +20336,7 @@
           <a:p>
             <a:fld id="{0F78D9C4-20C1-4B15-A116-16DC77AD9A1E}" type="datetime1">
               <a:rPr lang="ko-KR" altLang="en-US" smtClean="0"/>
-              <a:t>2025-07-16</a:t>
+              <a:t>2025-08-21</a:t>
             </a:fld>
             <a:endParaRPr lang="ko-KR" altLang="en-US"/>
           </a:p>
@@ -20739,7 +20762,7 @@
           <a:p>
             <a:fld id="{0F78D9C4-20C1-4B15-A116-16DC77AD9A1E}" type="datetime1">
               <a:rPr lang="ko-KR" altLang="en-US" smtClean="0"/>
-              <a:t>2025-07-16</a:t>
+              <a:t>2025-08-21</a:t>
             </a:fld>
             <a:endParaRPr lang="ko-KR" altLang="en-US" dirty="0"/>
           </a:p>
@@ -21179,7 +21202,7 @@
           <a:p>
             <a:fld id="{0F78D9C4-20C1-4B15-A116-16DC77AD9A1E}" type="datetime1">
               <a:rPr lang="ko-KR" altLang="en-US" smtClean="0"/>
-              <a:t>2025-07-16</a:t>
+              <a:t>2025-08-21</a:t>
             </a:fld>
             <a:endParaRPr lang="ko-KR" altLang="en-US" dirty="0"/>
           </a:p>
@@ -21722,7 +21745,7 @@
           <a:p>
             <a:fld id="{0F78D9C4-20C1-4B15-A116-16DC77AD9A1E}" type="datetime1">
               <a:rPr lang="ko-KR" altLang="en-US" smtClean="0"/>
-              <a:t>2025-07-16</a:t>
+              <a:t>2025-08-21</a:t>
             </a:fld>
             <a:endParaRPr lang="ko-KR" altLang="en-US"/>
           </a:p>
@@ -22158,7 +22181,7 @@
           <a:p>
             <a:fld id="{0F78D9C4-20C1-4B15-A116-16DC77AD9A1E}" type="datetime1">
               <a:rPr lang="ko-KR" altLang="en-US" smtClean="0"/>
-              <a:t>2025-07-16</a:t>
+              <a:t>2025-08-21</a:t>
             </a:fld>
             <a:endParaRPr lang="ko-KR" altLang="en-US"/>
           </a:p>
@@ -22557,7 +22580,7 @@
           <a:p>
             <a:fld id="{0F78D9C4-20C1-4B15-A116-16DC77AD9A1E}" type="datetime1">
               <a:rPr lang="ko-KR" altLang="en-US" smtClean="0"/>
-              <a:t>2025-07-16</a:t>
+              <a:t>2025-08-21</a:t>
             </a:fld>
             <a:endParaRPr lang="ko-KR" altLang="en-US"/>
           </a:p>
@@ -24382,7 +24405,7 @@
           <a:p>
             <a:fld id="{0F78D9C4-20C1-4B15-A116-16DC77AD9A1E}" type="datetime1">
               <a:rPr lang="ko-KR" altLang="en-US" smtClean="0"/>
-              <a:t>2025-07-16</a:t>
+              <a:t>2025-08-21</a:t>
             </a:fld>
             <a:endParaRPr lang="ko-KR" altLang="en-US"/>
           </a:p>
@@ -24654,7 +24677,7 @@
           <a:p>
             <a:fld id="{0F78D9C4-20C1-4B15-A116-16DC77AD9A1E}" type="datetime1">
               <a:rPr lang="ko-KR" altLang="en-US" smtClean="0"/>
-              <a:t>2025-07-16</a:t>
+              <a:t>2025-08-21</a:t>
             </a:fld>
             <a:endParaRPr lang="ko-KR" altLang="en-US"/>
           </a:p>
@@ -25242,7 +25265,7 @@
           <a:p>
             <a:fld id="{76022175-F16A-4A96-8E45-178BE9345AE9}" type="datetime6">
               <a:rPr lang="ko-KR" altLang="en-US" smtClean="0"/>
-              <a:t>2025년 7월</a:t>
+              <a:t>2025년 8월</a:t>
             </a:fld>
             <a:endParaRPr lang="ko-KR" altLang="en-US"/>
           </a:p>
@@ -25678,7 +25701,7 @@
           <a:p>
             <a:fld id="{76022175-F16A-4A96-8E45-178BE9345AE9}" type="datetime6">
               <a:rPr lang="ko-KR" altLang="en-US" smtClean="0"/>
-              <a:t>2025년 7월</a:t>
+              <a:t>2025년 8월</a:t>
             </a:fld>
             <a:endParaRPr lang="ko-KR" altLang="en-US"/>
           </a:p>
@@ -25991,7 +26014,7 @@
           <a:p>
             <a:fld id="{0F78D9C4-20C1-4B15-A116-16DC77AD9A1E}" type="datetime1">
               <a:rPr lang="ko-KR" altLang="en-US" smtClean="0"/>
-              <a:t>2025-07-16</a:t>
+              <a:t>2025-08-21</a:t>
             </a:fld>
             <a:endParaRPr lang="ko-KR" altLang="en-US"/>
           </a:p>
@@ -26428,7 +26451,7 @@
           <a:p>
             <a:fld id="{0F78D9C4-20C1-4B15-A116-16DC77AD9A1E}" type="datetime1">
               <a:rPr lang="ko-KR" altLang="en-US" smtClean="0"/>
-              <a:t>2025-07-16</a:t>
+              <a:t>2025-08-21</a:t>
             </a:fld>
             <a:endParaRPr lang="ko-KR" altLang="en-US"/>
           </a:p>
@@ -27127,7 +27150,7 @@
           <a:p>
             <a:fld id="{0F78D9C4-20C1-4B15-A116-16DC77AD9A1E}" type="datetime1">
               <a:rPr lang="ko-KR" altLang="en-US" smtClean="0"/>
-              <a:t>2025-07-16</a:t>
+              <a:t>2025-08-21</a:t>
             </a:fld>
             <a:endParaRPr lang="ko-KR" altLang="en-US"/>
           </a:p>
@@ -27671,7 +27694,7 @@
           <a:p>
             <a:fld id="{0F78D9C4-20C1-4B15-A116-16DC77AD9A1E}" type="datetime1">
               <a:rPr lang="ko-KR" altLang="en-US" smtClean="0"/>
-              <a:t>2025-07-16</a:t>
+              <a:t>2025-08-21</a:t>
             </a:fld>
             <a:endParaRPr lang="ko-KR" altLang="en-US"/>
           </a:p>
